--- a/onboarding/presentaciones/ONB12_Comunidad_AT_WORK_y_feedback.pptx
+++ b/onboarding/presentaciones/ONB12_Comunidad_AT_WORK_y_feedback.pptx
@@ -508,7 +508,7 @@
           <a:p>
             <a:r>
               <a:rPr lang="en-US" dirty="0"/>
-              <a:t>Quiero mostrarte ahora cómo vamos a usar la Comunidad AT WORK durante estos cinco meses, porque este espacio no está pensado solamente para recibir información. Es parte del acompañamiento que vas a tener entre una sesión y la siguiente.
+              <a:t>Quiero mostrarte ahora cómo vamos a usar AT WORK Community durante estos cinco meses, porque este espacio no está pensado solamente para recibir información. Es parte del acompañamiento que vas a tener entre una sesión y la siguiente.
 La idea es que no tengas que guardar todas tus dudas, prácticas o situaciones hasta nuestra próxima clase. Quiero que tengas un lugar donde puedas traer lo que va apareciendo en tu semana y seguir avanzando mientras el proceso está ocurriendo.</a:t>
             </a:r>
             <a:endParaRPr lang="en-US" dirty="0"/>
@@ -1534,7 +1534,7 @@
                 <a:ea typeface="Source Serif Pro" pitchFamily="34" charset="-122"/>
                 <a:cs typeface="Source Serif Pro" pitchFamily="34" charset="-120"/>
               </a:rPr>
-              <a:t>Comunidad AT WORK + Cómo pedir feedback</a:t>
+              <a:t>AT WORK Community + Cómo pedir feedback</a:t>
             </a:r>
             <a:endParaRPr lang="en-US" sz="4000" dirty="0"/>
           </a:p>
